--- a/docs/HackFindr_presentation.pptx
+++ b/docs/HackFindr_presentation.pptx
@@ -2792,7 +2792,7 @@
                 <a:ea typeface="Calibri" pitchFamily="34" charset="-122"/>
                 <a:cs typeface="Calibri" pitchFamily="34" charset="-120"/>
               </a:rPr>
-              <a:t>The Solution: CampusEvents</a:t>
+              <a:t>The Solution: HackFindr</a:t>
             </a:r>
             <a:endParaRPr lang="en-US" sz="3200" dirty="0"/>
           </a:p>
@@ -7519,9 +7519,68 @@
           <a:chExt cx="0" cy="0"/>
         </a:xfrm>
       </p:grpSpPr>
+      <p:sp>
+        <p:nvSpPr>
+          <p:cNvPr id="2" name="Text 0"/>
+          <p:cNvSpPr txBox="1"/>
+          <p:nvPr/>
+        </p:nvSpPr>
+        <p:spPr>
+          <a:xfrm>
+            <a:off x="411480" y="274320"/>
+            <a:ext cx="8229600" cy="594360"/>
+          </a:xfrm>
+          <a:prstGeom prst="rect">
+            <a:avLst/>
+          </a:prstGeom>
+          <a:noFill/>
+          <a:ln/>
+        </p:spPr>
+        <p:txBody>
+          <a:bodyPr wrap="square" lIns="0" tIns="0" rIns="0" bIns="0" rtlCol="0" anchor="ctr"/>
+          <a:lstStyle/>
+          <a:p>
+            <a:pPr indent="0" marL="0">
+              <a:buNone/>
+            </a:pPr>
+            <a:r>
+              <a:rPr lang="en-US" sz="3000" b="1" dirty="0">
+                <a:solidFill>
+                  <a:srgbClr val="1A1630"/>
+                </a:solidFill>
+                <a:latin typeface="Calibri" pitchFamily="34" charset="0"/>
+                <a:ea typeface="Calibri" pitchFamily="34" charset="-122"/>
+                <a:cs typeface="Calibri" pitchFamily="34" charset="-120"/>
+              </a:rPr>
+              <a:t>Impact and Benefits</a:t>
+            </a:r>
+            <a:endParaRPr lang="en-US" sz="3000" dirty="0"/>
+          </a:p>
+        </p:txBody>
+      </p:sp>
+      <p:sp>
+        <p:nvSpPr>
+          <p:cNvPr id="3" name="Shape 1"/>
+          <p:cNvSpPr/>
+          <p:nvPr/>
+        </p:nvSpPr>
+        <p:spPr>
+          <a:xfrm>
+            <a:off x="411480" y="1097280"/>
+            <a:ext cx="475488" cy="475488"/>
+          </a:xfrm>
+          <a:prstGeom prst="ellipse">
+            <a:avLst/>
+          </a:prstGeom>
+          <a:solidFill>
+            <a:srgbClr val="6C5CE7"/>
+          </a:solidFill>
+          <a:ln/>
+        </p:spPr>
+      </p:sp>
       <p:pic>
         <p:nvPicPr>
-          <p:cNvPr id="2" name="Image 0" descr="img/p-009.jpg">    </p:cNvPr>
+          <p:cNvPr id="4" name="Image 0" descr="preencoded.png">    </p:cNvPr>
           <p:cNvPicPr>
             <a:picLocks noChangeAspect="1"/>
           </p:cNvPicPr>
@@ -7529,13 +7588,14 @@
         </p:nvPicPr>
         <p:blipFill>
           <a:blip r:embed="rId1"/>
-          <a:srcRect l="0" r="0" t="0" b="0"/>
-          <a:stretch/>
+          <a:stretch>
+            <a:fillRect/>
+          </a:stretch>
         </p:blipFill>
         <p:spPr>
           <a:xfrm>
-            <a:off x="0" y="0"/>
-            <a:ext cx="3017520" cy="5143500"/>
+            <a:off x="534924" y="1220724"/>
+            <a:ext cx="228600" cy="228600"/>
           </a:xfrm>
           <a:prstGeom prst="rect">
             <a:avLst/>
@@ -7544,14 +7604,14 @@
       </p:pic>
       <p:sp>
         <p:nvSpPr>
-          <p:cNvPr id="3" name="Text 0"/>
-          <p:cNvSpPr txBox="1"/>
-          <p:nvPr/>
-        </p:nvSpPr>
-        <p:spPr>
-          <a:xfrm>
-            <a:off x="3474720" y="320040"/>
-            <a:ext cx="5303520" cy="594360"/>
+          <p:cNvPr id="5" name="Text 2"/>
+          <p:cNvSpPr txBox="1"/>
+          <p:nvPr/>
+        </p:nvSpPr>
+        <p:spPr>
+          <a:xfrm>
+            <a:off x="1024128" y="1078992"/>
+            <a:ext cx="2834640" cy="292608"/>
           </a:xfrm>
           <a:prstGeom prst="rect">
             <a:avLst/>
@@ -7567,7 +7627,46 @@
               <a:buNone/>
             </a:pPr>
             <a:r>
-              <a:rPr lang="en-US" sz="3200" b="1" dirty="0">
+              <a:rPr lang="en-US" sz="1400" b="1" dirty="0">
+                <a:solidFill>
+                  <a:srgbClr val="4B3BC4"/>
+                </a:solidFill>
+                <a:latin typeface="Calibri" pitchFamily="34" charset="0"/>
+                <a:ea typeface="Calibri" pitchFamily="34" charset="-122"/>
+                <a:cs typeface="Calibri" pitchFamily="34" charset="-120"/>
+              </a:rPr>
+              <a:t>For students</a:t>
+            </a:r>
+            <a:endParaRPr lang="en-US" sz="1400" dirty="0"/>
+          </a:p>
+        </p:txBody>
+      </p:sp>
+      <p:sp>
+        <p:nvSpPr>
+          <p:cNvPr id="6" name="Text 3"/>
+          <p:cNvSpPr txBox="1"/>
+          <p:nvPr/>
+        </p:nvSpPr>
+        <p:spPr>
+          <a:xfrm>
+            <a:off x="1024128" y="1389888"/>
+            <a:ext cx="2834640" cy="777240"/>
+          </a:xfrm>
+          <a:prstGeom prst="rect">
+            <a:avLst/>
+          </a:prstGeom>
+          <a:noFill/>
+          <a:ln/>
+        </p:spPr>
+        <p:txBody>
+          <a:bodyPr wrap="square" lIns="0" tIns="0" rIns="0" bIns="0" rtlCol="0" anchor="t"/>
+          <a:lstStyle/>
+          <a:p>
+            <a:pPr indent="0" marL="0">
+              <a:buNone/>
+            </a:pPr>
+            <a:r>
+              <a:rPr lang="en-US" sz="1100" dirty="0">
                 <a:solidFill>
                   <a:srgbClr val="1A1630"/>
                 </a:solidFill>
@@ -7575,22 +7674,22 @@
                 <a:ea typeface="Calibri" pitchFamily="34" charset="-122"/>
                 <a:cs typeface="Calibri" pitchFamily="34" charset="-120"/>
               </a:rPr>
-              <a:t>Impact and Benefits</a:t>
-            </a:r>
-            <a:endParaRPr lang="en-US" sz="3200" dirty="0"/>
-          </a:p>
-        </p:txBody>
-      </p:sp>
-      <p:sp>
-        <p:nvSpPr>
-          <p:cNvPr id="4" name="Shape 1"/>
+              <a:t>Find nearby events in seconds. Tier-2/3 students stop missing out; Free and 1st-year filters widen access.</a:t>
+            </a:r>
+            <a:endParaRPr lang="en-US" sz="1100" dirty="0"/>
+          </a:p>
+        </p:txBody>
+      </p:sp>
+      <p:sp>
+        <p:nvSpPr>
+          <p:cNvPr id="7" name="Shape 4"/>
           <p:cNvSpPr/>
           <p:nvPr/>
         </p:nvSpPr>
         <p:spPr>
           <a:xfrm>
-            <a:off x="3474720" y="1188720"/>
-            <a:ext cx="594360" cy="594360"/>
+            <a:off x="411480" y="2359152"/>
+            <a:ext cx="475488" cy="475488"/>
           </a:xfrm>
           <a:prstGeom prst="ellipse">
             <a:avLst/>
@@ -7603,7 +7702,7 @@
       </p:sp>
       <p:pic>
         <p:nvPicPr>
-          <p:cNvPr id="5" name="Image 1" descr="preencoded.png">    </p:cNvPr>
+          <p:cNvPr id="8" name="Image 1" descr="preencoded.png">    </p:cNvPr>
           <p:cNvPicPr>
             <a:picLocks noChangeAspect="1"/>
           </p:cNvPicPr>
@@ -7617,8 +7716,8 @@
         </p:blipFill>
         <p:spPr>
           <a:xfrm>
-            <a:off x="3630168" y="1344168"/>
-            <a:ext cx="283464" cy="283464"/>
+            <a:off x="534924" y="2482596"/>
+            <a:ext cx="228600" cy="228600"/>
           </a:xfrm>
           <a:prstGeom prst="rect">
             <a:avLst/>
@@ -7627,14 +7726,14 @@
       </p:pic>
       <p:sp>
         <p:nvSpPr>
-          <p:cNvPr id="6" name="Text 2"/>
-          <p:cNvSpPr txBox="1"/>
-          <p:nvPr/>
-        </p:nvSpPr>
-        <p:spPr>
-          <a:xfrm>
-            <a:off x="4251960" y="1170432"/>
-            <a:ext cx="4480560" cy="320040"/>
+          <p:cNvPr id="9" name="Text 5"/>
+          <p:cNvSpPr txBox="1"/>
+          <p:nvPr/>
+        </p:nvSpPr>
+        <p:spPr>
+          <a:xfrm>
+            <a:off x="1024128" y="2340864"/>
+            <a:ext cx="2834640" cy="292608"/>
           </a:xfrm>
           <a:prstGeom prst="rect">
             <a:avLst/>
@@ -7650,7 +7749,7 @@
               <a:buNone/>
             </a:pPr>
             <a:r>
-              <a:rPr lang="en-US" sz="1600" b="1" dirty="0">
+              <a:rPr lang="en-US" sz="1400" b="1" dirty="0">
                 <a:solidFill>
                   <a:srgbClr val="4B3BC4"/>
                 </a:solidFill>
@@ -7658,38 +7757,38 @@
                 <a:ea typeface="Calibri" pitchFamily="34" charset="-122"/>
                 <a:cs typeface="Calibri" pitchFamily="34" charset="-120"/>
               </a:rPr>
-              <a:t>For students</a:t>
-            </a:r>
-            <a:endParaRPr lang="en-US" sz="1600" dirty="0"/>
-          </a:p>
-        </p:txBody>
-      </p:sp>
-      <p:sp>
-        <p:nvSpPr>
-          <p:cNvPr id="7" name="Text 3"/>
-          <p:cNvSpPr txBox="1"/>
-          <p:nvPr/>
-        </p:nvSpPr>
-        <p:spPr>
-          <a:xfrm>
-            <a:off x="4251960" y="1508760"/>
-            <a:ext cx="4480560" cy="685800"/>
-          </a:xfrm>
-          <a:prstGeom prst="rect">
-            <a:avLst/>
-          </a:prstGeom>
-          <a:noFill/>
-          <a:ln/>
-        </p:spPr>
-        <p:txBody>
-          <a:bodyPr wrap="square" lIns="0" tIns="0" rIns="0" bIns="0" rtlCol="0" anchor="ctr"/>
+              <a:t>For colleges and organisers</a:t>
+            </a:r>
+            <a:endParaRPr lang="en-US" sz="1400" dirty="0"/>
+          </a:p>
+        </p:txBody>
+      </p:sp>
+      <p:sp>
+        <p:nvSpPr>
+          <p:cNvPr id="10" name="Text 6"/>
+          <p:cNvSpPr txBox="1"/>
+          <p:nvPr/>
+        </p:nvSpPr>
+        <p:spPr>
+          <a:xfrm>
+            <a:off x="1024128" y="2651760"/>
+            <a:ext cx="2834640" cy="777240"/>
+          </a:xfrm>
+          <a:prstGeom prst="rect">
+            <a:avLst/>
+          </a:prstGeom>
+          <a:noFill/>
+          <a:ln/>
+        </p:spPr>
+        <p:txBody>
+          <a:bodyPr wrap="square" lIns="0" tIns="0" rIns="0" bIns="0" rtlCol="0" anchor="t"/>
           <a:lstStyle/>
           <a:p>
             <a:pPr indent="0" marL="0">
               <a:buNone/>
             </a:pPr>
             <a:r>
-              <a:rPr lang="en-US" sz="1200" dirty="0">
+              <a:rPr lang="en-US" sz="1100" dirty="0">
                 <a:solidFill>
                   <a:srgbClr val="1A1630"/>
                 </a:solidFill>
@@ -7697,22 +7796,22 @@
                 <a:ea typeface="Calibri" pitchFamily="34" charset="-122"/>
                 <a:cs typeface="Calibri" pitchFamily="34" charset="-120"/>
               </a:rPr>
-              <a:t>Find nearby events in seconds. Tier-2/3 students (Raipur, Bhilai) stop missing out. Free and 1st-year filters widen access.</a:t>
-            </a:r>
-            <a:endParaRPr lang="en-US" sz="1200" dirty="0"/>
-          </a:p>
-        </p:txBody>
-      </p:sp>
-      <p:sp>
-        <p:nvSpPr>
-          <p:cNvPr id="8" name="Shape 4"/>
+              <a:t>Poster events get free online reach with one photo, and wider participation.</a:t>
+            </a:r>
+            <a:endParaRPr lang="en-US" sz="1100" dirty="0"/>
+          </a:p>
+        </p:txBody>
+      </p:sp>
+      <p:sp>
+        <p:nvSpPr>
+          <p:cNvPr id="11" name="Shape 7"/>
           <p:cNvSpPr/>
           <p:nvPr/>
         </p:nvSpPr>
         <p:spPr>
           <a:xfrm>
-            <a:off x="3474720" y="2468880"/>
-            <a:ext cx="594360" cy="594360"/>
+            <a:off x="411480" y="3621024"/>
+            <a:ext cx="475488" cy="475488"/>
           </a:xfrm>
           <a:prstGeom prst="ellipse">
             <a:avLst/>
@@ -7725,7 +7824,7 @@
       </p:sp>
       <p:pic>
         <p:nvPicPr>
-          <p:cNvPr id="9" name="Image 2" descr="preencoded.png">    </p:cNvPr>
+          <p:cNvPr id="12" name="Image 2" descr="preencoded.png">    </p:cNvPr>
           <p:cNvPicPr>
             <a:picLocks noChangeAspect="1"/>
           </p:cNvPicPr>
@@ -7739,8 +7838,8 @@
         </p:blipFill>
         <p:spPr>
           <a:xfrm>
-            <a:off x="3630168" y="2624328"/>
-            <a:ext cx="283464" cy="283464"/>
+            <a:off x="534924" y="3744468"/>
+            <a:ext cx="228600" cy="228600"/>
           </a:xfrm>
           <a:prstGeom prst="rect">
             <a:avLst/>
@@ -7749,14 +7848,14 @@
       </p:pic>
       <p:sp>
         <p:nvSpPr>
-          <p:cNvPr id="10" name="Text 5"/>
-          <p:cNvSpPr txBox="1"/>
-          <p:nvPr/>
-        </p:nvSpPr>
-        <p:spPr>
-          <a:xfrm>
-            <a:off x="4251960" y="2450592"/>
-            <a:ext cx="4480560" cy="320040"/>
+          <p:cNvPr id="13" name="Text 8"/>
+          <p:cNvSpPr txBox="1"/>
+          <p:nvPr/>
+        </p:nvSpPr>
+        <p:spPr>
+          <a:xfrm>
+            <a:off x="1024128" y="3602736"/>
+            <a:ext cx="2834640" cy="292608"/>
           </a:xfrm>
           <a:prstGeom prst="rect">
             <a:avLst/>
@@ -7772,7 +7871,7 @@
               <a:buNone/>
             </a:pPr>
             <a:r>
-              <a:rPr lang="en-US" sz="1600" b="1" dirty="0">
+              <a:rPr lang="en-US" sz="1400" b="1" dirty="0">
                 <a:solidFill>
                   <a:srgbClr val="4B3BC4"/>
                 </a:solidFill>
@@ -7780,38 +7879,38 @@
                 <a:ea typeface="Calibri" pitchFamily="34" charset="-122"/>
                 <a:cs typeface="Calibri" pitchFamily="34" charset="-120"/>
               </a:rPr>
-              <a:t>For colleges and organisers</a:t>
-            </a:r>
-            <a:endParaRPr lang="en-US" sz="1600" dirty="0"/>
-          </a:p>
-        </p:txBody>
-      </p:sp>
-      <p:sp>
-        <p:nvSpPr>
-          <p:cNvPr id="11" name="Text 6"/>
-          <p:cNvSpPr txBox="1"/>
-          <p:nvPr/>
-        </p:nvSpPr>
-        <p:spPr>
-          <a:xfrm>
-            <a:off x="4251960" y="2788920"/>
-            <a:ext cx="4480560" cy="685800"/>
-          </a:xfrm>
-          <a:prstGeom prst="rect">
-            <a:avLst/>
-          </a:prstGeom>
-          <a:noFill/>
-          <a:ln/>
-        </p:spPr>
-        <p:txBody>
-          <a:bodyPr wrap="square" lIns="0" tIns="0" rIns="0" bIns="0" rtlCol="0" anchor="ctr"/>
+              <a:t>For society</a:t>
+            </a:r>
+            <a:endParaRPr lang="en-US" sz="1400" dirty="0"/>
+          </a:p>
+        </p:txBody>
+      </p:sp>
+      <p:sp>
+        <p:nvSpPr>
+          <p:cNvPr id="14" name="Text 9"/>
+          <p:cNvSpPr txBox="1"/>
+          <p:nvPr/>
+        </p:nvSpPr>
+        <p:spPr>
+          <a:xfrm>
+            <a:off x="1024128" y="3913632"/>
+            <a:ext cx="2834640" cy="777240"/>
+          </a:xfrm>
+          <a:prstGeom prst="rect">
+            <a:avLst/>
+          </a:prstGeom>
+          <a:noFill/>
+          <a:ln/>
+        </p:spPr>
+        <p:txBody>
+          <a:bodyPr wrap="square" lIns="0" tIns="0" rIns="0" bIns="0" rtlCol="0" anchor="t"/>
           <a:lstStyle/>
           <a:p>
             <a:pPr indent="0" marL="0">
               <a:buNone/>
             </a:pPr>
             <a:r>
-              <a:rPr lang="en-US" sz="1200" dirty="0">
+              <a:rPr lang="en-US" sz="1100" dirty="0">
                 <a:solidFill>
                   <a:srgbClr val="1A1630"/>
                 </a:solidFill>
@@ -7819,35 +7918,37 @@
                 <a:ea typeface="Calibri" pitchFamily="34" charset="-122"/>
                 <a:cs typeface="Calibri" pitchFamily="34" charset="-120"/>
               </a:rPr>
-              <a:t>Poster events get free online reach with one photo, and wider participation.</a:t>
-            </a:r>
-            <a:endParaRPr lang="en-US" sz="1200" dirty="0"/>
-          </a:p>
-        </p:txBody>
-      </p:sp>
-      <p:sp>
-        <p:nvSpPr>
-          <p:cNvPr id="12" name="Shape 7"/>
+              <a:t>Supports NEP 2020, Digital India and Startup India; narrows the metro vs non-metro gap.</a:t>
+            </a:r>
+            <a:endParaRPr lang="en-US" sz="1100" dirty="0"/>
+          </a:p>
+        </p:txBody>
+      </p:sp>
+      <p:sp>
+        <p:nvSpPr>
+          <p:cNvPr id="15" name="Shape 10"/>
           <p:cNvSpPr/>
           <p:nvPr/>
         </p:nvSpPr>
         <p:spPr>
           <a:xfrm>
-            <a:off x="3474720" y="3749040"/>
-            <a:ext cx="594360" cy="594360"/>
-          </a:xfrm>
-          <a:prstGeom prst="ellipse">
-            <a:avLst/>
+            <a:off x="4114800" y="960120"/>
+            <a:ext cx="4663440" cy="3931920"/>
+          </a:xfrm>
+          <a:prstGeom prst="roundRect">
+            <a:avLst>
+              <a:gd name="adj" fmla="val 2326"/>
+            </a:avLst>
           </a:prstGeom>
           <a:solidFill>
-            <a:srgbClr val="6C5CE7"/>
+            <a:srgbClr val="EEEBFD"/>
           </a:solidFill>
           <a:ln/>
         </p:spPr>
       </p:sp>
       <p:pic>
         <p:nvPicPr>
-          <p:cNvPr id="13" name="Image 3" descr="preencoded.png">    </p:cNvPr>
+          <p:cNvPr id="16" name="Image 3" descr="preencoded.png">    </p:cNvPr>
           <p:cNvPicPr>
             <a:picLocks noChangeAspect="1"/>
           </p:cNvPicPr>
@@ -7861,8 +7962,8 @@
         </p:blipFill>
         <p:spPr>
           <a:xfrm>
-            <a:off x="3630168" y="3904488"/>
-            <a:ext cx="283464" cy="283464"/>
+            <a:off x="4297680" y="1115568"/>
+            <a:ext cx="237744" cy="237744"/>
           </a:xfrm>
           <a:prstGeom prst="rect">
             <a:avLst/>
@@ -7871,14 +7972,14 @@
       </p:pic>
       <p:sp>
         <p:nvSpPr>
-          <p:cNvPr id="14" name="Text 8"/>
-          <p:cNvSpPr txBox="1"/>
-          <p:nvPr/>
-        </p:nvSpPr>
-        <p:spPr>
-          <a:xfrm>
-            <a:off x="4251960" y="3730752"/>
-            <a:ext cx="4480560" cy="320040"/>
+          <p:cNvPr id="17" name="Text 11"/>
+          <p:cNvSpPr txBox="1"/>
+          <p:nvPr/>
+        </p:nvSpPr>
+        <p:spPr>
+          <a:xfrm>
+            <a:off x="4590288" y="1088136"/>
+            <a:ext cx="1645920" cy="292608"/>
           </a:xfrm>
           <a:prstGeom prst="rect">
             <a:avLst/>
@@ -7894,7 +7995,7 @@
               <a:buNone/>
             </a:pPr>
             <a:r>
-              <a:rPr lang="en-US" sz="1600" b="1" dirty="0">
+              <a:rPr lang="en-US" sz="1400" b="1" dirty="0">
                 <a:solidFill>
                   <a:srgbClr val="4B3BC4"/>
                 </a:solidFill>
@@ -7902,22 +8003,44 @@
                 <a:ea typeface="Calibri" pitchFamily="34" charset="-122"/>
                 <a:cs typeface="Calibri" pitchFamily="34" charset="-120"/>
               </a:rPr>
-              <a:t>For society</a:t>
-            </a:r>
-            <a:endParaRPr lang="en-US" sz="1600" dirty="0"/>
-          </a:p>
-        </p:txBody>
-      </p:sp>
-      <p:sp>
-        <p:nvSpPr>
-          <p:cNvPr id="15" name="Text 9"/>
-          <p:cNvSpPr txBox="1"/>
-          <p:nvPr/>
-        </p:nvSpPr>
-        <p:spPr>
-          <a:xfrm>
-            <a:off x="4251960" y="4069080"/>
-            <a:ext cx="4480560" cy="685800"/>
+              <a:t>Future additions</a:t>
+            </a:r>
+            <a:endParaRPr lang="en-US" sz="1400" dirty="0"/>
+          </a:p>
+        </p:txBody>
+      </p:sp>
+      <p:sp>
+        <p:nvSpPr>
+          <p:cNvPr id="18" name="Shape 12"/>
+          <p:cNvSpPr/>
+          <p:nvPr/>
+        </p:nvSpPr>
+        <p:spPr>
+          <a:xfrm>
+            <a:off x="6263640" y="1097280"/>
+            <a:ext cx="1417320" cy="274320"/>
+          </a:xfrm>
+          <a:prstGeom prst="roundRect">
+            <a:avLst>
+              <a:gd name="adj" fmla="val 50000"/>
+            </a:avLst>
+          </a:prstGeom>
+          <a:solidFill>
+            <a:srgbClr val="6C5CE7"/>
+          </a:solidFill>
+          <a:ln/>
+        </p:spPr>
+      </p:sp>
+      <p:sp>
+        <p:nvSpPr>
+          <p:cNvPr id="19" name="Text 13"/>
+          <p:cNvSpPr txBox="1"/>
+          <p:nvPr/>
+        </p:nvSpPr>
+        <p:spPr>
+          <a:xfrm>
+            <a:off x="6263640" y="1097280"/>
+            <a:ext cx="1417320" cy="274320"/>
           </a:xfrm>
           <a:prstGeom prst="rect">
             <a:avLst/>
@@ -7929,24 +8052,160 @@
           <a:bodyPr wrap="square" lIns="0" tIns="0" rIns="0" bIns="0" rtlCol="0" anchor="ctr"/>
           <a:lstStyle/>
           <a:p>
-            <a:pPr indent="0" marL="0">
-              <a:buNone/>
-            </a:pPr>
-            <a:r>
-              <a:rPr lang="en-US" sz="1200" dirty="0">
-                <a:solidFill>
-                  <a:srgbClr val="1A1630"/>
-                </a:solidFill>
-                <a:latin typeface="Calibri" pitchFamily="34" charset="0"/>
-                <a:ea typeface="Calibri" pitchFamily="34" charset="-122"/>
-                <a:cs typeface="Calibri" pitchFamily="34" charset="-120"/>
-              </a:rPr>
-              <a:t>Supports NEP 2020, Digital India and Startup India; narrows the metro vs non-metro awareness gap.</a:t>
-            </a:r>
-            <a:endParaRPr lang="en-US" sz="1200" dirty="0"/>
-          </a:p>
-        </p:txBody>
-      </p:sp>
+            <a:pPr algn="ctr" indent="0" marL="0">
+              <a:buNone/>
+            </a:pPr>
+            <a:r>
+              <a:rPr lang="en-US" sz="900" b="1" dirty="0">
+                <a:solidFill>
+                  <a:srgbClr val="FFFFFF"/>
+                </a:solidFill>
+                <a:latin typeface="Calibri" pitchFamily="34" charset="0"/>
+                <a:ea typeface="Calibri" pitchFamily="34" charset="-122"/>
+                <a:cs typeface="Calibri" pitchFamily="34" charset="-120"/>
+              </a:rPr>
+              <a:t>Opportunity dashboard</a:t>
+            </a:r>
+            <a:endParaRPr lang="en-US" sz="900" dirty="0"/>
+          </a:p>
+        </p:txBody>
+      </p:sp>
+      <p:sp>
+        <p:nvSpPr>
+          <p:cNvPr id="20" name="Shape 14"/>
+          <p:cNvSpPr/>
+          <p:nvPr/>
+        </p:nvSpPr>
+        <p:spPr>
+          <a:xfrm>
+            <a:off x="7772400" y="1097280"/>
+            <a:ext cx="868680" cy="274320"/>
+          </a:xfrm>
+          <a:prstGeom prst="roundRect">
+            <a:avLst>
+              <a:gd name="adj" fmla="val 50000"/>
+            </a:avLst>
+          </a:prstGeom>
+          <a:solidFill>
+            <a:srgbClr val="1FA37A"/>
+          </a:solidFill>
+          <a:ln/>
+        </p:spPr>
+      </p:sp>
+      <p:sp>
+        <p:nvSpPr>
+          <p:cNvPr id="21" name="Text 15"/>
+          <p:cNvSpPr txBox="1"/>
+          <p:nvPr/>
+        </p:nvSpPr>
+        <p:spPr>
+          <a:xfrm>
+            <a:off x="7772400" y="1097280"/>
+            <a:ext cx="868680" cy="274320"/>
+          </a:xfrm>
+          <a:prstGeom prst="rect">
+            <a:avLst/>
+          </a:prstGeom>
+          <a:noFill/>
+          <a:ln/>
+        </p:spPr>
+        <p:txBody>
+          <a:bodyPr wrap="square" lIns="0" tIns="0" rIns="0" bIns="0" rtlCol="0" anchor="ctr"/>
+          <a:lstStyle/>
+          <a:p>
+            <a:pPr algn="ctr" indent="0" marL="0">
+              <a:buNone/>
+            </a:pPr>
+            <a:r>
+              <a:rPr lang="en-US" sz="900" b="1" dirty="0">
+                <a:solidFill>
+                  <a:srgbClr val="FFFFFF"/>
+                </a:solidFill>
+                <a:latin typeface="Calibri" pitchFamily="34" charset="0"/>
+                <a:ea typeface="Calibri" pitchFamily="34" charset="-122"/>
+                <a:cs typeface="Calibri" pitchFamily="34" charset="-120"/>
+              </a:rPr>
+              <a:t>AI chatbot</a:t>
+            </a:r>
+            <a:endParaRPr lang="en-US" sz="900" dirty="0"/>
+          </a:p>
+        </p:txBody>
+      </p:sp>
+      <p:pic>
+        <p:nvPicPr>
+          <p:cNvPr id="22" name="Image 4" descr="img/dash.jpg">    </p:cNvPr>
+          <p:cNvPicPr>
+            <a:picLocks noChangeAspect="1"/>
+          </p:cNvPicPr>
+          <p:nvPr/>
+        </p:nvPicPr>
+        <p:blipFill>
+          <a:blip r:embed="rId5"/>
+          <a:stretch>
+            <a:fillRect/>
+          </a:stretch>
+        </p:blipFill>
+        <p:spPr>
+          <a:xfrm>
+            <a:off x="4297680" y="1508760"/>
+            <a:ext cx="4297680" cy="2688082"/>
+          </a:xfrm>
+          <a:prstGeom prst="rect">
+            <a:avLst/>
+          </a:prstGeom>
+        </p:spPr>
+      </p:pic>
+      <p:sp>
+        <p:nvSpPr>
+          <p:cNvPr id="23" name="Shape 16"/>
+          <p:cNvSpPr/>
+          <p:nvPr/>
+        </p:nvSpPr>
+        <p:spPr>
+          <a:xfrm>
+            <a:off x="4297680" y="4251960"/>
+            <a:ext cx="4297680" cy="548640"/>
+          </a:xfrm>
+          <a:prstGeom prst="roundRect">
+            <a:avLst>
+              <a:gd name="adj" fmla="val 10000"/>
+            </a:avLst>
+          </a:prstGeom>
+          <a:solidFill>
+            <a:srgbClr val="FFFFFF"/>
+          </a:solidFill>
+          <a:ln w="9525">
+            <a:solidFill>
+              <a:srgbClr val="D9D4F7"/>
+            </a:solidFill>
+            <a:prstDash val="solid"/>
+          </a:ln>
+        </p:spPr>
+      </p:sp>
+      <p:pic>
+        <p:nvPicPr>
+          <p:cNvPr id="24" name="Image 5" descr="img/chat.jpg">    </p:cNvPr>
+          <p:cNvPicPr>
+            <a:picLocks noChangeAspect="1"/>
+          </p:cNvPicPr>
+          <p:nvPr/>
+        </p:nvPicPr>
+        <p:blipFill>
+          <a:blip r:embed="rId6"/>
+          <a:stretch>
+            <a:fillRect/>
+          </a:stretch>
+        </p:blipFill>
+        <p:spPr>
+          <a:xfrm>
+            <a:off x="4343400" y="4270248"/>
+            <a:ext cx="4206240" cy="512635"/>
+          </a:xfrm>
+          <a:prstGeom prst="rect">
+            <a:avLst/>
+          </a:prstGeom>
+        </p:spPr>
+      </p:pic>
     </p:spTree>
   </p:cSld>
   <p:clrMapOvr>
